--- a/docs/CRUDBuilder_presentation.pptx
+++ b/docs/CRUDBuilder_presentation.pptx
@@ -6,11 +6,10 @@
   </p:sldMasterIdLst>
   <p:sldIdLst>
     <p:sldId id="256" r:id="rId2"/>
-    <p:sldId id="257" r:id="rId3"/>
-    <p:sldId id="258" r:id="rId4"/>
-    <p:sldId id="259" r:id="rId5"/>
-    <p:sldId id="260" r:id="rId6"/>
-    <p:sldId id="261" r:id="rId7"/>
+    <p:sldId id="258" r:id="rId3"/>
+    <p:sldId id="259" r:id="rId4"/>
+    <p:sldId id="260" r:id="rId5"/>
+    <p:sldId id="261" r:id="rId6"/>
   </p:sldIdLst>
   <p:sldSz cx="12192000" cy="6858000"/>
   <p:notesSz cx="6858000" cy="9144000"/>
@@ -109,7 +108,221 @@
       </a:defRPr>
     </a:lvl9pPr>
   </p:defaultTextStyle>
+  <p:extLst>
+    <p:ext uri="{EFAFB233-063F-42B5-8137-9DF3F51BA10A}">
+      <p15:sldGuideLst xmlns:p15="http://schemas.microsoft.com/office/powerpoint/2012/main"/>
+    </p:ext>
+  </p:extLst>
 </p:presentation>
+</file>
+
+<file path=ppt/changesInfos/changesInfo1.xml><?xml version="1.0" encoding="utf-8"?>
+<pc:chgInfo xmlns:a="http://schemas.openxmlformats.org/drawingml/2006/main" xmlns:r="http://schemas.openxmlformats.org/officeDocument/2006/relationships" xmlns:ac="http://schemas.microsoft.com/office/drawing/2013/main/command" xmlns:pc="http://schemas.microsoft.com/office/powerpoint/2013/main/command">
+  <pc:docChgLst>
+    <pc:chgData name="Ace Cook" userId="0bf321af4922a22e" providerId="LiveId" clId="{E017BC05-3534-459D-9538-BE99AD254B3B}"/>
+    <pc:docChg chg="custSel delSld modSld">
+      <pc:chgData name="Ace Cook" userId="0bf321af4922a22e" providerId="LiveId" clId="{E017BC05-3534-459D-9538-BE99AD254B3B}" dt="2026-05-11T15:21:23.886" v="465" actId="1076"/>
+      <pc:docMkLst>
+        <pc:docMk/>
+      </pc:docMkLst>
+      <pc:sldChg chg="del">
+        <pc:chgData name="Ace Cook" userId="0bf321af4922a22e" providerId="LiveId" clId="{E017BC05-3534-459D-9538-BE99AD254B3B}" dt="2026-05-10T15:47:56.345" v="318" actId="2696"/>
+        <pc:sldMkLst>
+          <pc:docMk/>
+          <pc:sldMk cId="886079053" sldId="257"/>
+        </pc:sldMkLst>
+      </pc:sldChg>
+      <pc:sldChg chg="addSp delSp modSp mod setBg">
+        <pc:chgData name="Ace Cook" userId="0bf321af4922a22e" providerId="LiveId" clId="{E017BC05-3534-459D-9538-BE99AD254B3B}" dt="2026-05-10T15:41:29.306" v="205" actId="20577"/>
+        <pc:sldMkLst>
+          <pc:docMk/>
+          <pc:sldMk cId="944675023" sldId="258"/>
+        </pc:sldMkLst>
+        <pc:spChg chg="mod">
+          <ac:chgData name="Ace Cook" userId="0bf321af4922a22e" providerId="LiveId" clId="{E017BC05-3534-459D-9538-BE99AD254B3B}" dt="2026-05-10T15:38:52.475" v="10" actId="26606"/>
+          <ac:spMkLst>
+            <pc:docMk/>
+            <pc:sldMk cId="944675023" sldId="258"/>
+            <ac:spMk id="2" creationId="{C2EFE2DB-B607-3FF5-7441-9ECBA53148B7}"/>
+          </ac:spMkLst>
+        </pc:spChg>
+        <pc:spChg chg="del">
+          <ac:chgData name="Ace Cook" userId="0bf321af4922a22e" providerId="LiveId" clId="{E017BC05-3534-459D-9538-BE99AD254B3B}" dt="2026-05-10T15:37:29.044" v="0" actId="22"/>
+          <ac:spMkLst>
+            <pc:docMk/>
+            <pc:sldMk cId="944675023" sldId="258"/>
+            <ac:spMk id="3" creationId="{047982F2-1A56-B483-C342-F06D168B5063}"/>
+          </ac:spMkLst>
+        </pc:spChg>
+        <pc:spChg chg="mod">
+          <ac:chgData name="Ace Cook" userId="0bf321af4922a22e" providerId="LiveId" clId="{E017BC05-3534-459D-9538-BE99AD254B3B}" dt="2026-05-10T15:41:29.306" v="205" actId="20577"/>
+          <ac:spMkLst>
+            <pc:docMk/>
+            <pc:sldMk cId="944675023" sldId="258"/>
+            <ac:spMk id="4" creationId="{631DB12F-CCB4-353E-C884-24BCADCCAB70}"/>
+          </ac:spMkLst>
+        </pc:spChg>
+        <pc:spChg chg="add del mod">
+          <ac:chgData name="Ace Cook" userId="0bf321af4922a22e" providerId="LiveId" clId="{E017BC05-3534-459D-9538-BE99AD254B3B}" dt="2026-05-10T15:38:31.263" v="4" actId="931"/>
+          <ac:spMkLst>
+            <pc:docMk/>
+            <pc:sldMk cId="944675023" sldId="258"/>
+            <ac:spMk id="8" creationId="{9073DE98-DED1-FBA7-2B6E-59DD7608FE14}"/>
+          </ac:spMkLst>
+        </pc:spChg>
+        <pc:spChg chg="add del mod">
+          <ac:chgData name="Ace Cook" userId="0bf321af4922a22e" providerId="LiveId" clId="{E017BC05-3534-459D-9538-BE99AD254B3B}" dt="2026-05-10T15:38:42.392" v="7" actId="478"/>
+          <ac:spMkLst>
+            <pc:docMk/>
+            <pc:sldMk cId="944675023" sldId="258"/>
+            <ac:spMk id="12" creationId="{72459306-BA88-B8A0-40DB-0DD45E474C0C}"/>
+          </ac:spMkLst>
+        </pc:spChg>
+        <pc:picChg chg="add del mod ord">
+          <ac:chgData name="Ace Cook" userId="0bf321af4922a22e" providerId="LiveId" clId="{E017BC05-3534-459D-9538-BE99AD254B3B}" dt="2026-05-10T15:37:45.468" v="3" actId="478"/>
+          <ac:picMkLst>
+            <pc:docMk/>
+            <pc:sldMk cId="944675023" sldId="258"/>
+            <ac:picMk id="6" creationId="{2F980B60-9A6A-19EE-1806-8CDA11C87D1A}"/>
+          </ac:picMkLst>
+        </pc:picChg>
+        <pc:picChg chg="add del mod ord">
+          <ac:chgData name="Ace Cook" userId="0bf321af4922a22e" providerId="LiveId" clId="{E017BC05-3534-459D-9538-BE99AD254B3B}" dt="2026-05-10T15:38:37.023" v="6" actId="478"/>
+          <ac:picMkLst>
+            <pc:docMk/>
+            <pc:sldMk cId="944675023" sldId="258"/>
+            <ac:picMk id="10" creationId="{1B0A83D4-B8DD-7502-C268-9B8788326B5B}"/>
+          </ac:picMkLst>
+        </pc:picChg>
+        <pc:picChg chg="add mod">
+          <ac:chgData name="Ace Cook" userId="0bf321af4922a22e" providerId="LiveId" clId="{E017BC05-3534-459D-9538-BE99AD254B3B}" dt="2026-05-10T15:38:52.475" v="10" actId="26606"/>
+          <ac:picMkLst>
+            <pc:docMk/>
+            <pc:sldMk cId="944675023" sldId="258"/>
+            <ac:picMk id="14" creationId="{3BD11120-EAD8-92E9-E984-3B83AB2EB864}"/>
+          </ac:picMkLst>
+        </pc:picChg>
+      </pc:sldChg>
+      <pc:sldChg chg="addSp delSp modSp mod setBg">
+        <pc:chgData name="Ace Cook" userId="0bf321af4922a22e" providerId="LiveId" clId="{E017BC05-3534-459D-9538-BE99AD254B3B}" dt="2026-05-10T15:47:42.877" v="317" actId="20577"/>
+        <pc:sldMkLst>
+          <pc:docMk/>
+          <pc:sldMk cId="1640554192" sldId="259"/>
+        </pc:sldMkLst>
+        <pc:spChg chg="mod">
+          <ac:chgData name="Ace Cook" userId="0bf321af4922a22e" providerId="LiveId" clId="{E017BC05-3534-459D-9538-BE99AD254B3B}" dt="2026-05-10T15:47:12.255" v="300" actId="26606"/>
+          <ac:spMkLst>
+            <pc:docMk/>
+            <pc:sldMk cId="1640554192" sldId="259"/>
+            <ac:spMk id="2" creationId="{5D841224-54A9-6659-D047-06350CC138F5}"/>
+          </ac:spMkLst>
+        </pc:spChg>
+        <pc:spChg chg="del">
+          <ac:chgData name="Ace Cook" userId="0bf321af4922a22e" providerId="LiveId" clId="{E017BC05-3534-459D-9538-BE99AD254B3B}" dt="2026-05-10T15:42:06.853" v="206" actId="478"/>
+          <ac:spMkLst>
+            <pc:docMk/>
+            <pc:sldMk cId="1640554192" sldId="259"/>
+            <ac:spMk id="3" creationId="{C011A1A1-9F16-260E-819E-EA30363911F2}"/>
+          </ac:spMkLst>
+        </pc:spChg>
+        <pc:spChg chg="mod ord">
+          <ac:chgData name="Ace Cook" userId="0bf321af4922a22e" providerId="LiveId" clId="{E017BC05-3534-459D-9538-BE99AD254B3B}" dt="2026-05-10T15:47:42.877" v="317" actId="20577"/>
+          <ac:spMkLst>
+            <pc:docMk/>
+            <pc:sldMk cId="1640554192" sldId="259"/>
+            <ac:spMk id="4" creationId="{CA7C498D-ECA8-2E4E-36E3-162C4D515FA6}"/>
+          </ac:spMkLst>
+        </pc:spChg>
+        <pc:picChg chg="add mod">
+          <ac:chgData name="Ace Cook" userId="0bf321af4922a22e" providerId="LiveId" clId="{E017BC05-3534-459D-9538-BE99AD254B3B}" dt="2026-05-10T15:47:16.386" v="301" actId="14100"/>
+          <ac:picMkLst>
+            <pc:docMk/>
+            <pc:sldMk cId="1640554192" sldId="259"/>
+            <ac:picMk id="6" creationId="{DC281E39-1FA6-7078-BDE8-F5EBBBCFD3AB}"/>
+          </ac:picMkLst>
+        </pc:picChg>
+        <pc:picChg chg="add mod">
+          <ac:chgData name="Ace Cook" userId="0bf321af4922a22e" providerId="LiveId" clId="{E017BC05-3534-459D-9538-BE99AD254B3B}" dt="2026-05-10T15:47:24.686" v="303" actId="1076"/>
+          <ac:picMkLst>
+            <pc:docMk/>
+            <pc:sldMk cId="1640554192" sldId="259"/>
+            <ac:picMk id="8" creationId="{EFAC38D3-FBFC-5A20-FC93-F85E3950BF02}"/>
+          </ac:picMkLst>
+        </pc:picChg>
+      </pc:sldChg>
+      <pc:sldChg chg="addSp delSp modSp mod setBg">
+        <pc:chgData name="Ace Cook" userId="0bf321af4922a22e" providerId="LiveId" clId="{E017BC05-3534-459D-9538-BE99AD254B3B}" dt="2026-05-10T16:13:20.816" v="461" actId="5793"/>
+        <pc:sldMkLst>
+          <pc:docMk/>
+          <pc:sldMk cId="804844431" sldId="260"/>
+        </pc:sldMkLst>
+        <pc:spChg chg="mod">
+          <ac:chgData name="Ace Cook" userId="0bf321af4922a22e" providerId="LiveId" clId="{E017BC05-3534-459D-9538-BE99AD254B3B}" dt="2026-05-10T15:58:51.941" v="325" actId="26606"/>
+          <ac:spMkLst>
+            <pc:docMk/>
+            <pc:sldMk cId="804844431" sldId="260"/>
+            <ac:spMk id="2" creationId="{545AD468-40E8-8C53-47AC-B92FFBDB6552}"/>
+          </ac:spMkLst>
+        </pc:spChg>
+        <pc:spChg chg="del">
+          <ac:chgData name="Ace Cook" userId="0bf321af4922a22e" providerId="LiveId" clId="{E017BC05-3534-459D-9538-BE99AD254B3B}" dt="2026-05-10T15:58:27.047" v="319" actId="478"/>
+          <ac:spMkLst>
+            <pc:docMk/>
+            <pc:sldMk cId="804844431" sldId="260"/>
+            <ac:spMk id="3" creationId="{4C2977E4-4181-7AC2-EFED-3DE891661AAB}"/>
+          </ac:spMkLst>
+        </pc:spChg>
+        <pc:spChg chg="mod ord">
+          <ac:chgData name="Ace Cook" userId="0bf321af4922a22e" providerId="LiveId" clId="{E017BC05-3534-459D-9538-BE99AD254B3B}" dt="2026-05-10T16:13:20.816" v="461" actId="5793"/>
+          <ac:spMkLst>
+            <pc:docMk/>
+            <pc:sldMk cId="804844431" sldId="260"/>
+            <ac:spMk id="4" creationId="{BEA53EAB-DC5D-6BB5-704D-0855388C8DF8}"/>
+          </ac:spMkLst>
+        </pc:spChg>
+        <pc:picChg chg="add mod ord">
+          <ac:chgData name="Ace Cook" userId="0bf321af4922a22e" providerId="LiveId" clId="{E017BC05-3534-459D-9538-BE99AD254B3B}" dt="2026-05-10T15:58:51.941" v="325" actId="26606"/>
+          <ac:picMkLst>
+            <pc:docMk/>
+            <pc:sldMk cId="804844431" sldId="260"/>
+            <ac:picMk id="6" creationId="{6DF84914-4442-480B-C0B7-F891E3BCDBBB}"/>
+          </ac:picMkLst>
+        </pc:picChg>
+        <pc:picChg chg="add mod">
+          <ac:chgData name="Ace Cook" userId="0bf321af4922a22e" providerId="LiveId" clId="{E017BC05-3534-459D-9538-BE99AD254B3B}" dt="2026-05-10T15:58:51.941" v="325" actId="26606"/>
+          <ac:picMkLst>
+            <pc:docMk/>
+            <pc:sldMk cId="804844431" sldId="260"/>
+            <ac:picMk id="8" creationId="{0628F916-0F0C-FDAE-AACF-5452BAF67380}"/>
+          </ac:picMkLst>
+        </pc:picChg>
+      </pc:sldChg>
+      <pc:sldChg chg="addSp delSp modSp mod">
+        <pc:chgData name="Ace Cook" userId="0bf321af4922a22e" providerId="LiveId" clId="{E017BC05-3534-459D-9538-BE99AD254B3B}" dt="2026-05-11T15:21:23.886" v="465" actId="1076"/>
+        <pc:sldMkLst>
+          <pc:docMk/>
+          <pc:sldMk cId="844433502" sldId="261"/>
+        </pc:sldMkLst>
+        <pc:spChg chg="del">
+          <ac:chgData name="Ace Cook" userId="0bf321af4922a22e" providerId="LiveId" clId="{E017BC05-3534-459D-9538-BE99AD254B3B}" dt="2026-05-11T15:20:55.564" v="462" actId="478"/>
+          <ac:spMkLst>
+            <pc:docMk/>
+            <pc:sldMk cId="844433502" sldId="261"/>
+            <ac:spMk id="3" creationId="{865CAB94-8112-ED9D-AC84-CDB3FDE411E9}"/>
+          </ac:spMkLst>
+        </pc:spChg>
+        <pc:picChg chg="add mod">
+          <ac:chgData name="Ace Cook" userId="0bf321af4922a22e" providerId="LiveId" clId="{E017BC05-3534-459D-9538-BE99AD254B3B}" dt="2026-05-11T15:21:23.886" v="465" actId="1076"/>
+          <ac:picMkLst>
+            <pc:docMk/>
+            <pc:sldMk cId="844433502" sldId="261"/>
+            <ac:picMk id="6" creationId="{3A63E1E8-FA7E-55CC-AFBC-4DED95D978D2}"/>
+          </ac:picMkLst>
+        </pc:picChg>
+      </pc:sldChg>
+    </pc:docChg>
+  </pc:docChgLst>
+</pc:chgInfo>
 </file>
 
 <file path=ppt/slideLayouts/slideLayout1.xml><?xml version="1.0" encoding="utf-8"?>
@@ -325,7 +538,7 @@
           <a:p>
             <a:fld id="{FE28DFE7-2816-48D7-8FF1-CCD37AD5106E}" type="datetimeFigureOut">
               <a:rPr lang="en-US" smtClean="0"/>
-              <a:t>5/7/2026</a:t>
+              <a:t>5/10/2026</a:t>
             </a:fld>
             <a:endParaRPr lang="en-US"/>
           </a:p>
@@ -616,7 +829,7 @@
           <a:p>
             <a:fld id="{FE28DFE7-2816-48D7-8FF1-CCD37AD5106E}" type="datetimeFigureOut">
               <a:rPr lang="en-US" smtClean="0"/>
-              <a:t>5/7/2026</a:t>
+              <a:t>5/10/2026</a:t>
             </a:fld>
             <a:endParaRPr lang="en-US"/>
           </a:p>
@@ -875,7 +1088,7 @@
           <a:p>
             <a:fld id="{FE28DFE7-2816-48D7-8FF1-CCD37AD5106E}" type="datetimeFigureOut">
               <a:rPr lang="en-US" smtClean="0"/>
-              <a:t>5/7/2026</a:t>
+              <a:t>5/10/2026</a:t>
             </a:fld>
             <a:endParaRPr lang="en-US"/>
           </a:p>
@@ -1344,7 +1557,7 @@
           <a:p>
             <a:fld id="{FE28DFE7-2816-48D7-8FF1-CCD37AD5106E}" type="datetimeFigureOut">
               <a:rPr lang="en-US" smtClean="0"/>
-              <a:t>5/7/2026</a:t>
+              <a:t>5/10/2026</a:t>
             </a:fld>
             <a:endParaRPr lang="en-US"/>
           </a:p>
@@ -1524,7 +1737,7 @@
           <a:p>
             <a:fld id="{FE28DFE7-2816-48D7-8FF1-CCD37AD5106E}" type="datetimeFigureOut">
               <a:rPr lang="en-US" smtClean="0"/>
-              <a:t>5/7/2026</a:t>
+              <a:t>5/10/2026</a:t>
             </a:fld>
             <a:endParaRPr lang="en-US"/>
           </a:p>
@@ -2100,7 +2313,7 @@
           <a:p>
             <a:fld id="{FE28DFE7-2816-48D7-8FF1-CCD37AD5106E}" type="datetimeFigureOut">
               <a:rPr lang="en-US" smtClean="0"/>
-              <a:t>5/7/2026</a:t>
+              <a:t>5/10/2026</a:t>
             </a:fld>
             <a:endParaRPr lang="en-US"/>
           </a:p>
@@ -2432,7 +2645,7 @@
           <a:p>
             <a:fld id="{FE28DFE7-2816-48D7-8FF1-CCD37AD5106E}" type="datetimeFigureOut">
               <a:rPr lang="en-US" smtClean="0"/>
-              <a:t>5/7/2026</a:t>
+              <a:t>5/10/2026</a:t>
             </a:fld>
             <a:endParaRPr lang="en-US"/>
           </a:p>
@@ -2607,7 +2820,7 @@
           <a:p>
             <a:fld id="{FE28DFE7-2816-48D7-8FF1-CCD37AD5106E}" type="datetimeFigureOut">
               <a:rPr lang="en-US" smtClean="0"/>
-              <a:t>5/7/2026</a:t>
+              <a:t>5/10/2026</a:t>
             </a:fld>
             <a:endParaRPr lang="en-US"/>
           </a:p>
@@ -2787,7 +3000,7 @@
           <a:p>
             <a:fld id="{FE28DFE7-2816-48D7-8FF1-CCD37AD5106E}" type="datetimeFigureOut">
               <a:rPr lang="en-US" smtClean="0"/>
-              <a:t>5/7/2026</a:t>
+              <a:t>5/10/2026</a:t>
             </a:fld>
             <a:endParaRPr lang="en-US"/>
           </a:p>
@@ -2957,7 +3170,7 @@
           <a:p>
             <a:fld id="{FE28DFE7-2816-48D7-8FF1-CCD37AD5106E}" type="datetimeFigureOut">
               <a:rPr lang="en-US" smtClean="0"/>
-              <a:t>5/7/2026</a:t>
+              <a:t>5/10/2026</a:t>
             </a:fld>
             <a:endParaRPr lang="en-US"/>
           </a:p>
@@ -3214,7 +3427,7 @@
           <a:p>
             <a:fld id="{FE28DFE7-2816-48D7-8FF1-CCD37AD5106E}" type="datetimeFigureOut">
               <a:rPr lang="en-US" smtClean="0"/>
-              <a:t>5/7/2026</a:t>
+              <a:t>5/10/2026</a:t>
             </a:fld>
             <a:endParaRPr lang="en-US"/>
           </a:p>
@@ -3506,7 +3719,7 @@
           <a:p>
             <a:fld id="{FE28DFE7-2816-48D7-8FF1-CCD37AD5106E}" type="datetimeFigureOut">
               <a:rPr lang="en-US" smtClean="0"/>
-              <a:t>5/7/2026</a:t>
+              <a:t>5/10/2026</a:t>
             </a:fld>
             <a:endParaRPr lang="en-US"/>
           </a:p>
@@ -3936,7 +4149,7 @@
           <a:p>
             <a:fld id="{FE28DFE7-2816-48D7-8FF1-CCD37AD5106E}" type="datetimeFigureOut">
               <a:rPr lang="en-US" smtClean="0"/>
-              <a:t>5/7/2026</a:t>
+              <a:t>5/10/2026</a:t>
             </a:fld>
             <a:endParaRPr lang="en-US"/>
           </a:p>
@@ -4054,7 +4267,7 @@
           <a:p>
             <a:fld id="{FE28DFE7-2816-48D7-8FF1-CCD37AD5106E}" type="datetimeFigureOut">
               <a:rPr lang="en-US" smtClean="0"/>
-              <a:t>5/7/2026</a:t>
+              <a:t>5/10/2026</a:t>
             </a:fld>
             <a:endParaRPr lang="en-US"/>
           </a:p>
@@ -4149,7 +4362,7 @@
           <a:p>
             <a:fld id="{FE28DFE7-2816-48D7-8FF1-CCD37AD5106E}" type="datetimeFigureOut">
               <a:rPr lang="en-US" smtClean="0"/>
-              <a:t>5/7/2026</a:t>
+              <a:t>5/10/2026</a:t>
             </a:fld>
             <a:endParaRPr lang="en-US"/>
           </a:p>
@@ -4432,7 +4645,7 @@
           <a:p>
             <a:fld id="{FE28DFE7-2816-48D7-8FF1-CCD37AD5106E}" type="datetimeFigureOut">
               <a:rPr lang="en-US" smtClean="0"/>
-              <a:t>5/7/2026</a:t>
+              <a:t>5/10/2026</a:t>
             </a:fld>
             <a:endParaRPr lang="en-US"/>
           </a:p>
@@ -4723,7 +4936,7 @@
           <a:p>
             <a:fld id="{FE28DFE7-2816-48D7-8FF1-CCD37AD5106E}" type="datetimeFigureOut">
               <a:rPr lang="en-US" smtClean="0"/>
-              <a:t>5/7/2026</a:t>
+              <a:t>5/10/2026</a:t>
             </a:fld>
             <a:endParaRPr lang="en-US"/>
           </a:p>
@@ -4954,7 +5167,7 @@
           <a:p>
             <a:fld id="{FE28DFE7-2816-48D7-8FF1-CCD37AD5106E}" type="datetimeFigureOut">
               <a:rPr lang="en-US" smtClean="0"/>
-              <a:t>5/7/2026</a:t>
+              <a:t>5/10/2026</a:t>
             </a:fld>
             <a:endParaRPr lang="en-US"/>
           </a:p>
@@ -5849,12 +6062,126 @@
           <a:chExt cx="0" cy="0"/>
         </a:xfrm>
       </p:grpSpPr>
+      <p:sp>
+        <p:nvSpPr>
+          <p:cNvPr id="2" name="Title 1">
+            <a:extLst>
+              <a:ext uri="{FF2B5EF4-FFF2-40B4-BE49-F238E27FC236}">
+                <a16:creationId xmlns:a16="http://schemas.microsoft.com/office/drawing/2014/main" id="{C2EFE2DB-B607-3FF5-7441-9ECBA53148B7}"/>
+              </a:ext>
+            </a:extLst>
+          </p:cNvPr>
+          <p:cNvSpPr>
+            <a:spLocks noGrp="1"/>
+          </p:cNvSpPr>
+          <p:nvPr>
+            <p:ph type="title"/>
+          </p:nvPr>
+        </p:nvSpPr>
+        <p:spPr>
+          <a:xfrm>
+            <a:off x="643192" y="609600"/>
+            <a:ext cx="3643674" cy="1905000"/>
+          </a:xfrm>
+        </p:spPr>
+        <p:txBody>
+          <a:bodyPr vert="horz" lIns="91440" tIns="45720" rIns="91440" bIns="45720" rtlCol="0" anchor="ctr">
+            <a:normAutofit/>
+          </a:bodyPr>
+          <a:lstStyle/>
+          <a:p>
+            <a:r>
+              <a:rPr lang="en-US" dirty="0"/>
+              <a:t>Code Snippet #1</a:t>
+            </a:r>
+          </a:p>
+        </p:txBody>
+      </p:sp>
+      <p:sp>
+        <p:nvSpPr>
+          <p:cNvPr id="4" name="Text Placeholder 3">
+            <a:extLst>
+              <a:ext uri="{FF2B5EF4-FFF2-40B4-BE49-F238E27FC236}">
+                <a16:creationId xmlns:a16="http://schemas.microsoft.com/office/drawing/2014/main" id="{631DB12F-CCB4-353E-C884-24BCADCCAB70}"/>
+              </a:ext>
+            </a:extLst>
+          </p:cNvPr>
+          <p:cNvSpPr>
+            <a:spLocks noGrp="1"/>
+          </p:cNvSpPr>
+          <p:nvPr>
+            <p:ph type="body" sz="half" idx="2"/>
+          </p:nvPr>
+        </p:nvSpPr>
+        <p:spPr>
+          <a:xfrm>
+            <a:off x="643192" y="2666999"/>
+            <a:ext cx="3643674" cy="3216276"/>
+          </a:xfrm>
+        </p:spPr>
+        <p:txBody>
+          <a:bodyPr vert="horz" lIns="91440" tIns="45720" rIns="91440" bIns="45720" rtlCol="0" anchor="t">
+            <a:normAutofit/>
+          </a:bodyPr>
+          <a:lstStyle/>
+          <a:p>
+            <a:pPr>
+              <a:buFont typeface="Arial"/>
+              <a:buChar char="•"/>
+            </a:pPr>
+            <a:r>
+              <a:rPr lang="en-US" dirty="0"/>
+              <a:t> Call back Function</a:t>
+            </a:r>
+          </a:p>
+          <a:p>
+            <a:pPr>
+              <a:buFont typeface="Arial"/>
+              <a:buChar char="•"/>
+            </a:pPr>
+            <a:r>
+              <a:rPr lang="en-US" dirty="0"/>
+              <a:t> Parses data from API </a:t>
+            </a:r>
+          </a:p>
+          <a:p>
+            <a:pPr>
+              <a:buFont typeface="Arial"/>
+              <a:buChar char="•"/>
+            </a:pPr>
+            <a:r>
+              <a:rPr lang="en-US" dirty="0"/>
+              <a:t> Error Handling </a:t>
+            </a:r>
+          </a:p>
+          <a:p>
+            <a:pPr>
+              <a:buFont typeface="Arial"/>
+              <a:buChar char="•"/>
+            </a:pPr>
+            <a:r>
+              <a:rPr lang="en-US" dirty="0"/>
+              <a:t> Gathers relevant data</a:t>
+            </a:r>
+          </a:p>
+          <a:p>
+            <a:pPr>
+              <a:buFont typeface="Arial"/>
+              <a:buChar char="•"/>
+            </a:pPr>
+            <a:r>
+              <a:rPr lang="en-US" dirty="0"/>
+              <a:t> Passes back data</a:t>
+            </a:r>
+          </a:p>
+        </p:txBody>
+      </p:sp>
       <p:pic>
         <p:nvPicPr>
-          <p:cNvPr id="5" name="Picture 4" descr="101010 data lines to infinity">
+          <p:cNvPr id="14" name="Picture 13">
             <a:extLst>
               <a:ext uri="{FF2B5EF4-FFF2-40B4-BE49-F238E27FC236}">
-                <a16:creationId xmlns:a16="http://schemas.microsoft.com/office/drawing/2014/main" id="{8C0F7277-9CA7-8F53-CBB6-F04598F5BBEB}"/>
+                <a16:creationId xmlns:a16="http://schemas.microsoft.com/office/drawing/2014/main" id="{3BD11120-EAD8-92E9-E984-3B83AB2EB864}"/>
               </a:ext>
             </a:extLst>
           </p:cNvPr>
@@ -5865,189 +6192,51 @@
         </p:nvPicPr>
         <p:blipFill>
           <a:blip r:embed="rId3">
-            <a:duotone>
-              <a:prstClr val="black"/>
-              <a:schemeClr val="bg1">
-                <a:tint val="45000"/>
-                <a:satMod val="400000"/>
-              </a:schemeClr>
-            </a:duotone>
-            <a:alphaModFix amt="25000"/>
+            <a:extLst>
+              <a:ext uri="{28A0092B-C50C-407E-A947-70E740481C1C}">
+                <a14:useLocalDpi xmlns:a14="http://schemas.microsoft.com/office/drawing/2010/main" val="0"/>
+              </a:ext>
+            </a:extLst>
           </a:blip>
-          <a:srcRect t="13127"/>
           <a:stretch>
             <a:fillRect/>
           </a:stretch>
         </p:blipFill>
         <p:spPr>
           <a:xfrm>
-            <a:off x="20" y="10"/>
-            <a:ext cx="12191980" cy="6857990"/>
+            <a:off x="4839931" y="645106"/>
+            <a:ext cx="6498758" cy="5247747"/>
           </a:xfrm>
-          <a:prstGeom prst="rect">
-            <a:avLst/>
+          <a:prstGeom prst="roundRect">
+            <a:avLst>
+              <a:gd name="adj" fmla="val 3517"/>
+            </a:avLst>
           </a:prstGeom>
+          <a:ln w="38100">
+            <a:gradFill flip="none" rotWithShape="1">
+              <a:gsLst>
+                <a:gs pos="0">
+                  <a:srgbClr val="363D46"/>
+                </a:gs>
+                <a:gs pos="100000">
+                  <a:srgbClr val="363D46">
+                    <a:lumMod val="75000"/>
+                  </a:srgbClr>
+                </a:gs>
+              </a:gsLst>
+              <a:lin ang="5400000" scaled="0"/>
+              <a:tileRect/>
+            </a:gradFill>
+          </a:ln>
+          <a:effectLst>
+            <a:innerShdw blurRad="57150" dist="38100" dir="14460000">
+              <a:srgbClr val="000000">
+                <a:alpha val="70000"/>
+              </a:srgbClr>
+            </a:innerShdw>
+          </a:effectLst>
         </p:spPr>
       </p:pic>
-      <p:sp>
-        <p:nvSpPr>
-          <p:cNvPr id="2" name="Title 1">
-            <a:extLst>
-              <a:ext uri="{FF2B5EF4-FFF2-40B4-BE49-F238E27FC236}">
-                <a16:creationId xmlns:a16="http://schemas.microsoft.com/office/drawing/2014/main" id="{D94B5679-BC60-50BE-19AA-7CECD81A329B}"/>
-              </a:ext>
-            </a:extLst>
-          </p:cNvPr>
-          <p:cNvSpPr>
-            <a:spLocks noGrp="1"/>
-          </p:cNvSpPr>
-          <p:nvPr>
-            <p:ph type="title"/>
-          </p:nvPr>
-        </p:nvSpPr>
-        <p:spPr>
-          <a:xfrm>
-            <a:off x="1751012" y="609601"/>
-            <a:ext cx="8676222" cy="3200400"/>
-          </a:xfrm>
-        </p:spPr>
-        <p:txBody>
-          <a:bodyPr vert="horz" lIns="91440" tIns="45720" rIns="91440" bIns="45720" rtlCol="0" anchor="b">
-            <a:normAutofit/>
-          </a:bodyPr>
-          <a:lstStyle/>
-          <a:p>
-            <a:pPr algn="ctr"/>
-            <a:r>
-              <a:rPr lang="en-US" sz="4800" dirty="0">
-                <a:effectLst>
-                  <a:glow rad="38100">
-                    <a:schemeClr val="bg1">
-                      <a:lumMod val="65000"/>
-                      <a:lumOff val="35000"/>
-                      <a:alpha val="50000"/>
-                    </a:schemeClr>
-                  </a:glow>
-                  <a:outerShdw blurRad="28575" dist="31750" dir="13200000" algn="tl" rotWithShape="0">
-                    <a:srgbClr val="000000">
-                      <a:alpha val="25000"/>
-                    </a:srgbClr>
-                  </a:outerShdw>
-                </a:effectLst>
-              </a:rPr>
-              <a:t>Code Excerpts </a:t>
-            </a:r>
-          </a:p>
-        </p:txBody>
-      </p:sp>
-    </p:spTree>
-    <p:extLst>
-      <p:ext uri="{BB962C8B-B14F-4D97-AF65-F5344CB8AC3E}">
-        <p14:creationId xmlns:p14="http://schemas.microsoft.com/office/powerpoint/2010/main" val="886079053"/>
-      </p:ext>
-    </p:extLst>
-  </p:cSld>
-  <p:clrMapOvr>
-    <a:masterClrMapping/>
-  </p:clrMapOvr>
-</p:sld>
-</file>
-
-<file path=ppt/slides/slide3.xml><?xml version="1.0" encoding="utf-8"?>
-<p:sld xmlns:a="http://schemas.openxmlformats.org/drawingml/2006/main" xmlns:r="http://schemas.openxmlformats.org/officeDocument/2006/relationships" xmlns:p="http://schemas.openxmlformats.org/presentationml/2006/main">
-  <p:cSld>
-    <p:spTree>
-      <p:nvGrpSpPr>
-        <p:cNvPr id="1" name=""/>
-        <p:cNvGrpSpPr/>
-        <p:nvPr/>
-      </p:nvGrpSpPr>
-      <p:grpSpPr>
-        <a:xfrm>
-          <a:off x="0" y="0"/>
-          <a:ext cx="0" cy="0"/>
-          <a:chOff x="0" y="0"/>
-          <a:chExt cx="0" cy="0"/>
-        </a:xfrm>
-      </p:grpSpPr>
-      <p:sp>
-        <p:nvSpPr>
-          <p:cNvPr id="2" name="Title 1">
-            <a:extLst>
-              <a:ext uri="{FF2B5EF4-FFF2-40B4-BE49-F238E27FC236}">
-                <a16:creationId xmlns:a16="http://schemas.microsoft.com/office/drawing/2014/main" id="{C2EFE2DB-B607-3FF5-7441-9ECBA53148B7}"/>
-              </a:ext>
-            </a:extLst>
-          </p:cNvPr>
-          <p:cNvSpPr>
-            <a:spLocks noGrp="1"/>
-          </p:cNvSpPr>
-          <p:nvPr>
-            <p:ph type="title"/>
-          </p:nvPr>
-        </p:nvSpPr>
-        <p:spPr/>
-        <p:txBody>
-          <a:bodyPr/>
-          <a:lstStyle/>
-          <a:p>
-            <a:r>
-              <a:rPr lang="en-US" dirty="0"/>
-              <a:t>Code Snippet #1</a:t>
-            </a:r>
-          </a:p>
-        </p:txBody>
-      </p:sp>
-      <p:sp>
-        <p:nvSpPr>
-          <p:cNvPr id="3" name="Picture Placeholder 2">
-            <a:extLst>
-              <a:ext uri="{FF2B5EF4-FFF2-40B4-BE49-F238E27FC236}">
-                <a16:creationId xmlns:a16="http://schemas.microsoft.com/office/drawing/2014/main" id="{047982F2-1A56-B483-C342-F06D168B5063}"/>
-              </a:ext>
-            </a:extLst>
-          </p:cNvPr>
-          <p:cNvSpPr>
-            <a:spLocks noGrp="1"/>
-          </p:cNvSpPr>
-          <p:nvPr>
-            <p:ph type="pic" idx="1"/>
-          </p:nvPr>
-        </p:nvSpPr>
-        <p:spPr/>
-        <p:txBody>
-          <a:bodyPr/>
-          <a:lstStyle/>
-          <a:p>
-            <a:endParaRPr lang="en-US"/>
-          </a:p>
-        </p:txBody>
-      </p:sp>
-      <p:sp>
-        <p:nvSpPr>
-          <p:cNvPr id="4" name="Text Placeholder 3">
-            <a:extLst>
-              <a:ext uri="{FF2B5EF4-FFF2-40B4-BE49-F238E27FC236}">
-                <a16:creationId xmlns:a16="http://schemas.microsoft.com/office/drawing/2014/main" id="{631DB12F-CCB4-353E-C884-24BCADCCAB70}"/>
-              </a:ext>
-            </a:extLst>
-          </p:cNvPr>
-          <p:cNvSpPr>
-            <a:spLocks noGrp="1"/>
-          </p:cNvSpPr>
-          <p:nvPr>
-            <p:ph type="body" sz="half" idx="2"/>
-          </p:nvPr>
-        </p:nvSpPr>
-        <p:spPr/>
-        <p:txBody>
-          <a:bodyPr/>
-          <a:lstStyle/>
-          <a:p>
-            <a:endParaRPr lang="en-US"/>
-          </a:p>
-        </p:txBody>
-      </p:sp>
     </p:spTree>
     <p:extLst>
       <p:ext uri="{BB962C8B-B14F-4D97-AF65-F5344CB8AC3E}">
@@ -6061,9 +6250,32 @@
 </p:sld>
 </file>
 
-<file path=ppt/slides/slide4.xml><?xml version="1.0" encoding="utf-8"?>
+<file path=ppt/slides/slide3.xml><?xml version="1.0" encoding="utf-8"?>
 <p:sld xmlns:a="http://schemas.openxmlformats.org/drawingml/2006/main" xmlns:r="http://schemas.openxmlformats.org/officeDocument/2006/relationships" xmlns:p="http://schemas.openxmlformats.org/presentationml/2006/main">
   <p:cSld>
+    <p:bg>
+      <p:bgPr>
+        <a:blipFill rotWithShape="1">
+          <a:blip r:embed="rId2">
+            <a:duotone>
+              <a:schemeClr val="bg2">
+                <a:shade val="28000"/>
+                <a:satMod val="94000"/>
+                <a:lumMod val="20000"/>
+              </a:schemeClr>
+              <a:schemeClr val="bg2">
+                <a:tint val="94000"/>
+                <a:shade val="84000"/>
+                <a:satMod val="148000"/>
+                <a:lumMod val="114000"/>
+              </a:schemeClr>
+            </a:duotone>
+          </a:blip>
+          <a:stretch/>
+        </a:blipFill>
+        <a:effectLst/>
+      </p:bgPr>
+    </p:bg>
     <p:spTree>
       <p:nvGrpSpPr>
         <p:cNvPr id="1" name="">
@@ -6100,43 +6312,209 @@
             <p:ph type="title"/>
           </p:nvPr>
         </p:nvSpPr>
-        <p:spPr/>
-        <p:txBody>
-          <a:bodyPr/>
+        <p:spPr>
+          <a:xfrm>
+            <a:off x="6096000" y="609599"/>
+            <a:ext cx="5435760" cy="2009775"/>
+          </a:xfrm>
+        </p:spPr>
+        <p:txBody>
+          <a:bodyPr vert="horz" lIns="91440" tIns="45720" rIns="91440" bIns="45720" rtlCol="0" anchor="ctr">
+            <a:normAutofit/>
+          </a:bodyPr>
           <a:lstStyle/>
           <a:p>
-            <a:r>
-              <a:rPr lang="en-US" dirty="0"/>
+            <a:pPr algn="ctr"/>
+            <a:r>
+              <a:rPr lang="en-US" sz="3200"/>
               <a:t>Code Snippet #2</a:t>
             </a:r>
           </a:p>
         </p:txBody>
       </p:sp>
-      <p:sp>
-        <p:nvSpPr>
-          <p:cNvPr id="3" name="Picture Placeholder 2">
+      <p:pic>
+        <p:nvPicPr>
+          <p:cNvPr id="6" name="Picture 5">
             <a:extLst>
               <a:ext uri="{FF2B5EF4-FFF2-40B4-BE49-F238E27FC236}">
-                <a16:creationId xmlns:a16="http://schemas.microsoft.com/office/drawing/2014/main" id="{C011A1A1-9F16-260E-819E-EA30363911F2}"/>
+                <a16:creationId xmlns:a16="http://schemas.microsoft.com/office/drawing/2014/main" id="{DC281E39-1FA6-7078-BDE8-F5EBBBCFD3AB}"/>
               </a:ext>
             </a:extLst>
           </p:cNvPr>
-          <p:cNvSpPr>
-            <a:spLocks noGrp="1"/>
-          </p:cNvSpPr>
-          <p:nvPr>
-            <p:ph type="pic" idx="1"/>
-          </p:nvPr>
-        </p:nvSpPr>
-        <p:spPr/>
-        <p:txBody>
-          <a:bodyPr/>
-          <a:lstStyle/>
-          <a:p>
-            <a:endParaRPr lang="en-US"/>
-          </a:p>
-        </p:txBody>
-      </p:sp>
+          <p:cNvPicPr>
+            <a:picLocks noChangeAspect="1"/>
+          </p:cNvPicPr>
+          <p:nvPr/>
+        </p:nvPicPr>
+        <p:blipFill>
+          <a:blip r:embed="rId3">
+            <a:extLst>
+              <a:ext uri="{28A0092B-C50C-407E-A947-70E740481C1C}">
+                <a14:useLocalDpi xmlns:a14="http://schemas.microsoft.com/office/drawing/2010/main" val="0"/>
+              </a:ext>
+            </a:extLst>
+          </a:blip>
+          <a:stretch>
+            <a:fillRect/>
+          </a:stretch>
+        </p:blipFill>
+        <p:spPr>
+          <a:xfrm>
+            <a:off x="707739" y="1289958"/>
+            <a:ext cx="5620581" cy="1377042"/>
+          </a:xfrm>
+          <a:custGeom>
+            <a:avLst/>
+            <a:gdLst/>
+            <a:ahLst/>
+            <a:cxnLst/>
+            <a:rect l="l" t="t" r="r" b="b"/>
+            <a:pathLst>
+              <a:path w="3416888" h="2057399">
+                <a:moveTo>
+                  <a:pt x="120172" y="0"/>
+                </a:moveTo>
+                <a:lnTo>
+                  <a:pt x="3296716" y="0"/>
+                </a:lnTo>
+                <a:cubicBezTo>
+                  <a:pt x="3363085" y="0"/>
+                  <a:pt x="3416888" y="53803"/>
+                  <a:pt x="3416888" y="120172"/>
+                </a:cubicBezTo>
+                <a:lnTo>
+                  <a:pt x="3416888" y="2057399"/>
+                </a:lnTo>
+                <a:lnTo>
+                  <a:pt x="0" y="2057399"/>
+                </a:lnTo>
+                <a:lnTo>
+                  <a:pt x="0" y="120172"/>
+                </a:lnTo>
+                <a:cubicBezTo>
+                  <a:pt x="0" y="53803"/>
+                  <a:pt x="53803" y="0"/>
+                  <a:pt x="120172" y="0"/>
+                </a:cubicBezTo>
+                <a:close/>
+              </a:path>
+            </a:pathLst>
+          </a:custGeom>
+          <a:ln w="38100">
+            <a:gradFill flip="none" rotWithShape="1">
+              <a:gsLst>
+                <a:gs pos="0">
+                  <a:srgbClr val="363D46"/>
+                </a:gs>
+                <a:gs pos="100000">
+                  <a:srgbClr val="363D46">
+                    <a:lumMod val="75000"/>
+                  </a:srgbClr>
+                </a:gs>
+              </a:gsLst>
+              <a:lin ang="5400000" scaled="0"/>
+              <a:tileRect/>
+            </a:gradFill>
+          </a:ln>
+          <a:effectLst>
+            <a:innerShdw blurRad="57150" dist="38100" dir="14460000">
+              <a:srgbClr val="000000">
+                <a:alpha val="70000"/>
+              </a:srgbClr>
+            </a:innerShdw>
+          </a:effectLst>
+        </p:spPr>
+      </p:pic>
+      <p:pic>
+        <p:nvPicPr>
+          <p:cNvPr id="8" name="Picture 7">
+            <a:extLst>
+              <a:ext uri="{FF2B5EF4-FFF2-40B4-BE49-F238E27FC236}">
+                <a16:creationId xmlns:a16="http://schemas.microsoft.com/office/drawing/2014/main" id="{EFAC38D3-FBFC-5A20-FC93-F85E3950BF02}"/>
+              </a:ext>
+            </a:extLst>
+          </p:cNvPr>
+          <p:cNvPicPr>
+            <a:picLocks noChangeAspect="1"/>
+          </p:cNvPicPr>
+          <p:nvPr/>
+        </p:nvPicPr>
+        <p:blipFill>
+          <a:blip r:embed="rId4">
+            <a:extLst>
+              <a:ext uri="{28A0092B-C50C-407E-A947-70E740481C1C}">
+                <a14:useLocalDpi xmlns:a14="http://schemas.microsoft.com/office/drawing/2010/main" val="0"/>
+              </a:ext>
+            </a:extLst>
+          </a:blip>
+          <a:stretch>
+            <a:fillRect/>
+          </a:stretch>
+        </p:blipFill>
+        <p:spPr>
+          <a:xfrm>
+            <a:off x="707739" y="3003996"/>
+            <a:ext cx="4401220" cy="3443956"/>
+          </a:xfrm>
+          <a:custGeom>
+            <a:avLst/>
+            <a:gdLst/>
+            <a:ahLst/>
+            <a:cxnLst/>
+            <a:rect l="l" t="t" r="r" b="b"/>
+            <a:pathLst>
+              <a:path w="3416888" h="3240120">
+                <a:moveTo>
+                  <a:pt x="0" y="0"/>
+                </a:moveTo>
+                <a:lnTo>
+                  <a:pt x="3416888" y="0"/>
+                </a:lnTo>
+                <a:lnTo>
+                  <a:pt x="3416888" y="3119948"/>
+                </a:lnTo>
+                <a:cubicBezTo>
+                  <a:pt x="3416888" y="3186317"/>
+                  <a:pt x="3363085" y="3240120"/>
+                  <a:pt x="3296716" y="3240120"/>
+                </a:cubicBezTo>
+                <a:lnTo>
+                  <a:pt x="120172" y="3240120"/>
+                </a:lnTo>
+                <a:cubicBezTo>
+                  <a:pt x="53803" y="3240120"/>
+                  <a:pt x="0" y="3186317"/>
+                  <a:pt x="0" y="3119948"/>
+                </a:cubicBezTo>
+                <a:close/>
+              </a:path>
+            </a:pathLst>
+          </a:custGeom>
+          <a:ln w="38100">
+            <a:gradFill flip="none" rotWithShape="1">
+              <a:gsLst>
+                <a:gs pos="0">
+                  <a:srgbClr val="363D46"/>
+                </a:gs>
+                <a:gs pos="100000">
+                  <a:srgbClr val="363D46">
+                    <a:lumMod val="75000"/>
+                  </a:srgbClr>
+                </a:gs>
+              </a:gsLst>
+              <a:lin ang="5400000" scaled="0"/>
+              <a:tileRect/>
+            </a:gradFill>
+          </a:ln>
+          <a:effectLst>
+            <a:innerShdw blurRad="57150" dist="38100" dir="14460000">
+              <a:srgbClr val="000000">
+                <a:alpha val="70000"/>
+              </a:srgbClr>
+            </a:innerShdw>
+          </a:effectLst>
+        </p:spPr>
+      </p:pic>
       <p:sp>
         <p:nvSpPr>
           <p:cNvPr id="4" name="Text Placeholder 3">
@@ -6153,12 +6531,56 @@
             <p:ph type="body" sz="half" idx="2"/>
           </p:nvPr>
         </p:nvSpPr>
-        <p:spPr/>
-        <p:txBody>
-          <a:bodyPr/>
+        <p:spPr>
+          <a:xfrm>
+            <a:off x="6096000" y="2774425"/>
+            <a:ext cx="5435760" cy="3288445"/>
+          </a:xfrm>
+        </p:spPr>
+        <p:txBody>
+          <a:bodyPr vert="horz" lIns="91440" tIns="45720" rIns="91440" bIns="45720" rtlCol="0" anchor="ctr">
+            <a:normAutofit/>
+          </a:bodyPr>
           <a:lstStyle/>
           <a:p>
-            <a:endParaRPr lang="en-US"/>
+            <a:pPr>
+              <a:buFont typeface="Arial"/>
+              <a:buChar char="•"/>
+            </a:pPr>
+            <a:r>
+              <a:rPr lang="en-US" dirty="0"/>
+              <a:t> Ease of use</a:t>
+            </a:r>
+          </a:p>
+          <a:p>
+            <a:pPr>
+              <a:buFont typeface="Arial"/>
+              <a:buChar char="•"/>
+            </a:pPr>
+            <a:r>
+              <a:rPr lang="en-US" dirty="0"/>
+              <a:t> Self Contained </a:t>
+            </a:r>
+          </a:p>
+          <a:p>
+            <a:pPr>
+              <a:buFont typeface="Arial"/>
+              <a:buChar char="•"/>
+            </a:pPr>
+            <a:r>
+              <a:rPr lang="en-US" dirty="0"/>
+              <a:t> Generality</a:t>
+            </a:r>
+          </a:p>
+          <a:p>
+            <a:pPr>
+              <a:buFont typeface="Arial"/>
+              <a:buChar char="•"/>
+            </a:pPr>
+            <a:r>
+              <a:rPr lang="en-US" dirty="0"/>
+              <a:t> Reuse</a:t>
+            </a:r>
           </a:p>
         </p:txBody>
       </p:sp>
@@ -6175,9 +6597,32 @@
 </p:sld>
 </file>
 
-<file path=ppt/slides/slide5.xml><?xml version="1.0" encoding="utf-8"?>
+<file path=ppt/slides/slide4.xml><?xml version="1.0" encoding="utf-8"?>
 <p:sld xmlns:a="http://schemas.openxmlformats.org/drawingml/2006/main" xmlns:r="http://schemas.openxmlformats.org/officeDocument/2006/relationships" xmlns:p="http://schemas.openxmlformats.org/presentationml/2006/main">
   <p:cSld>
+    <p:bg>
+      <p:bgPr>
+        <a:blipFill rotWithShape="1">
+          <a:blip r:embed="rId2">
+            <a:duotone>
+              <a:schemeClr val="bg2">
+                <a:shade val="28000"/>
+                <a:satMod val="94000"/>
+                <a:lumMod val="20000"/>
+              </a:schemeClr>
+              <a:schemeClr val="bg2">
+                <a:tint val="94000"/>
+                <a:shade val="84000"/>
+                <a:satMod val="148000"/>
+                <a:lumMod val="114000"/>
+              </a:schemeClr>
+            </a:duotone>
+          </a:blip>
+          <a:stretch/>
+        </a:blipFill>
+        <a:effectLst/>
+      </p:bgPr>
+    </p:bg>
     <p:spTree>
       <p:nvGrpSpPr>
         <p:cNvPr id="1" name="">
@@ -6214,43 +6659,209 @@
             <p:ph type="title"/>
           </p:nvPr>
         </p:nvSpPr>
-        <p:spPr/>
-        <p:txBody>
-          <a:bodyPr/>
+        <p:spPr>
+          <a:xfrm>
+            <a:off x="6096000" y="609599"/>
+            <a:ext cx="5435760" cy="2009775"/>
+          </a:xfrm>
+        </p:spPr>
+        <p:txBody>
+          <a:bodyPr vert="horz" lIns="91440" tIns="45720" rIns="91440" bIns="45720" rtlCol="0" anchor="ctr">
+            <a:normAutofit/>
+          </a:bodyPr>
           <a:lstStyle/>
           <a:p>
-            <a:r>
-              <a:rPr lang="en-US" dirty="0"/>
+            <a:pPr algn="ctr"/>
+            <a:r>
+              <a:rPr lang="en-US" sz="3200"/>
               <a:t>Code Snippet #3</a:t>
             </a:r>
           </a:p>
         </p:txBody>
       </p:sp>
-      <p:sp>
-        <p:nvSpPr>
-          <p:cNvPr id="3" name="Picture Placeholder 2">
+      <p:pic>
+        <p:nvPicPr>
+          <p:cNvPr id="8" name="Picture 7">
             <a:extLst>
               <a:ext uri="{FF2B5EF4-FFF2-40B4-BE49-F238E27FC236}">
-                <a16:creationId xmlns:a16="http://schemas.microsoft.com/office/drawing/2014/main" id="{4C2977E4-4181-7AC2-EFED-3DE891661AAB}"/>
+                <a16:creationId xmlns:a16="http://schemas.microsoft.com/office/drawing/2014/main" id="{0628F916-0F0C-FDAE-AACF-5452BAF67380}"/>
               </a:ext>
             </a:extLst>
           </p:cNvPr>
-          <p:cNvSpPr>
-            <a:spLocks noGrp="1"/>
-          </p:cNvSpPr>
-          <p:nvPr>
-            <p:ph type="pic" idx="1"/>
-          </p:nvPr>
-        </p:nvSpPr>
-        <p:spPr/>
-        <p:txBody>
-          <a:bodyPr/>
-          <a:lstStyle/>
-          <a:p>
-            <a:endParaRPr lang="en-US"/>
-          </a:p>
-        </p:txBody>
-      </p:sp>
+          <p:cNvPicPr>
+            <a:picLocks noChangeAspect="1"/>
+          </p:cNvPicPr>
+          <p:nvPr/>
+        </p:nvPicPr>
+        <p:blipFill>
+          <a:blip r:embed="rId3">
+            <a:extLst>
+              <a:ext uri="{28A0092B-C50C-407E-A947-70E740481C1C}">
+                <a14:useLocalDpi xmlns:a14="http://schemas.microsoft.com/office/drawing/2010/main" val="0"/>
+              </a:ext>
+            </a:extLst>
+          </a:blip>
+          <a:stretch>
+            <a:fillRect/>
+          </a:stretch>
+        </p:blipFill>
+        <p:spPr>
+          <a:xfrm>
+            <a:off x="707739" y="808416"/>
+            <a:ext cx="4765597" cy="1858582"/>
+          </a:xfrm>
+          <a:custGeom>
+            <a:avLst/>
+            <a:gdLst/>
+            <a:ahLst/>
+            <a:cxnLst/>
+            <a:rect l="l" t="t" r="r" b="b"/>
+            <a:pathLst>
+              <a:path w="3416888" h="2057399">
+                <a:moveTo>
+                  <a:pt x="120172" y="0"/>
+                </a:moveTo>
+                <a:lnTo>
+                  <a:pt x="3296716" y="0"/>
+                </a:lnTo>
+                <a:cubicBezTo>
+                  <a:pt x="3363085" y="0"/>
+                  <a:pt x="3416888" y="53803"/>
+                  <a:pt x="3416888" y="120172"/>
+                </a:cubicBezTo>
+                <a:lnTo>
+                  <a:pt x="3416888" y="2057399"/>
+                </a:lnTo>
+                <a:lnTo>
+                  <a:pt x="0" y="2057399"/>
+                </a:lnTo>
+                <a:lnTo>
+                  <a:pt x="0" y="120172"/>
+                </a:lnTo>
+                <a:cubicBezTo>
+                  <a:pt x="0" y="53803"/>
+                  <a:pt x="53803" y="0"/>
+                  <a:pt x="120172" y="0"/>
+                </a:cubicBezTo>
+                <a:close/>
+              </a:path>
+            </a:pathLst>
+          </a:custGeom>
+          <a:ln w="38100">
+            <a:gradFill flip="none" rotWithShape="1">
+              <a:gsLst>
+                <a:gs pos="0">
+                  <a:srgbClr val="363D46"/>
+                </a:gs>
+                <a:gs pos="100000">
+                  <a:srgbClr val="363D46">
+                    <a:lumMod val="75000"/>
+                  </a:srgbClr>
+                </a:gs>
+              </a:gsLst>
+              <a:lin ang="5400000" scaled="0"/>
+              <a:tileRect/>
+            </a:gradFill>
+          </a:ln>
+          <a:effectLst>
+            <a:innerShdw blurRad="57150" dist="38100" dir="14460000">
+              <a:srgbClr val="000000">
+                <a:alpha val="70000"/>
+              </a:srgbClr>
+            </a:innerShdw>
+          </a:effectLst>
+        </p:spPr>
+      </p:pic>
+      <p:pic>
+        <p:nvPicPr>
+          <p:cNvPr id="6" name="Picture 5">
+            <a:extLst>
+              <a:ext uri="{FF2B5EF4-FFF2-40B4-BE49-F238E27FC236}">
+                <a16:creationId xmlns:a16="http://schemas.microsoft.com/office/drawing/2014/main" id="{6DF84914-4442-480B-C0B7-F891E3BCDBBB}"/>
+              </a:ext>
+            </a:extLst>
+          </p:cNvPr>
+          <p:cNvPicPr>
+            <a:picLocks noChangeAspect="1"/>
+          </p:cNvPicPr>
+          <p:nvPr/>
+        </p:nvPicPr>
+        <p:blipFill>
+          <a:blip r:embed="rId4">
+            <a:extLst>
+              <a:ext uri="{28A0092B-C50C-407E-A947-70E740481C1C}">
+                <a14:useLocalDpi xmlns:a14="http://schemas.microsoft.com/office/drawing/2010/main" val="0"/>
+              </a:ext>
+            </a:extLst>
+          </a:blip>
+          <a:stretch>
+            <a:fillRect/>
+          </a:stretch>
+        </p:blipFill>
+        <p:spPr>
+          <a:xfrm>
+            <a:off x="707739" y="2947481"/>
+            <a:ext cx="4765597" cy="2513852"/>
+          </a:xfrm>
+          <a:custGeom>
+            <a:avLst/>
+            <a:gdLst/>
+            <a:ahLst/>
+            <a:cxnLst/>
+            <a:rect l="l" t="t" r="r" b="b"/>
+            <a:pathLst>
+              <a:path w="3416888" h="3240120">
+                <a:moveTo>
+                  <a:pt x="0" y="0"/>
+                </a:moveTo>
+                <a:lnTo>
+                  <a:pt x="3416888" y="0"/>
+                </a:lnTo>
+                <a:lnTo>
+                  <a:pt x="3416888" y="3119948"/>
+                </a:lnTo>
+                <a:cubicBezTo>
+                  <a:pt x="3416888" y="3186317"/>
+                  <a:pt x="3363085" y="3240120"/>
+                  <a:pt x="3296716" y="3240120"/>
+                </a:cubicBezTo>
+                <a:lnTo>
+                  <a:pt x="120172" y="3240120"/>
+                </a:lnTo>
+                <a:cubicBezTo>
+                  <a:pt x="53803" y="3240120"/>
+                  <a:pt x="0" y="3186317"/>
+                  <a:pt x="0" y="3119948"/>
+                </a:cubicBezTo>
+                <a:close/>
+              </a:path>
+            </a:pathLst>
+          </a:custGeom>
+          <a:ln w="38100">
+            <a:gradFill flip="none" rotWithShape="1">
+              <a:gsLst>
+                <a:gs pos="0">
+                  <a:srgbClr val="363D46"/>
+                </a:gs>
+                <a:gs pos="100000">
+                  <a:srgbClr val="363D46">
+                    <a:lumMod val="75000"/>
+                  </a:srgbClr>
+                </a:gs>
+              </a:gsLst>
+              <a:lin ang="5400000" scaled="0"/>
+              <a:tileRect/>
+            </a:gradFill>
+          </a:ln>
+          <a:effectLst>
+            <a:innerShdw blurRad="57150" dist="38100" dir="14460000">
+              <a:srgbClr val="000000">
+                <a:alpha val="70000"/>
+              </a:srgbClr>
+            </a:innerShdw>
+          </a:effectLst>
+        </p:spPr>
+      </p:pic>
       <p:sp>
         <p:nvSpPr>
           <p:cNvPr id="4" name="Text Placeholder 3">
@@ -6267,12 +6878,49 @@
             <p:ph type="body" sz="half" idx="2"/>
           </p:nvPr>
         </p:nvSpPr>
-        <p:spPr/>
-        <p:txBody>
-          <a:bodyPr/>
+        <p:spPr>
+          <a:xfrm>
+            <a:off x="6096000" y="2774425"/>
+            <a:ext cx="5435760" cy="3288445"/>
+          </a:xfrm>
+        </p:spPr>
+        <p:txBody>
+          <a:bodyPr vert="horz" lIns="91440" tIns="45720" rIns="91440" bIns="45720" rtlCol="0" anchor="ctr">
+            <a:normAutofit/>
+          </a:bodyPr>
           <a:lstStyle/>
           <a:p>
-            <a:endParaRPr lang="en-US"/>
+            <a:pPr>
+              <a:buFont typeface="Arial"/>
+              <a:buChar char="•"/>
+            </a:pPr>
+            <a:r>
+              <a:rPr lang="en-US" dirty="0"/>
+              <a:t> Deep Linking Capabilities</a:t>
+            </a:r>
+          </a:p>
+          <a:p>
+            <a:pPr>
+              <a:buFont typeface="Arial"/>
+              <a:buChar char="•"/>
+            </a:pPr>
+            <a:r>
+              <a:rPr lang="en-US" dirty="0"/>
+              <a:t> Reactive design </a:t>
+            </a:r>
+          </a:p>
+          <a:p>
+            <a:pPr>
+              <a:buFont typeface="Arial"/>
+              <a:buChar char="•"/>
+            </a:pPr>
+            <a:r>
+              <a:rPr lang="en-US" dirty="0"/>
+              <a:t> Parameter Storage</a:t>
+            </a:r>
+          </a:p>
+          <a:p>
+            <a:endParaRPr lang="en-US" dirty="0"/>
           </a:p>
         </p:txBody>
       </p:sp>
@@ -6289,7 +6937,7 @@
 </p:sld>
 </file>
 
-<file path=ppt/slides/slide6.xml><?xml version="1.0" encoding="utf-8"?>
+<file path=ppt/slides/slide5.xml><?xml version="1.0" encoding="utf-8"?>
 <p:sld xmlns:a="http://schemas.openxmlformats.org/drawingml/2006/main" xmlns:r="http://schemas.openxmlformats.org/officeDocument/2006/relationships" xmlns:p="http://schemas.openxmlformats.org/presentationml/2006/main">
   <p:cSld>
     <p:spTree>
@@ -6335,38 +6983,8 @@
           <a:p>
             <a:r>
               <a:rPr lang="en-US" dirty="0"/>
-              <a:t>Code </a:t>
-            </a:r>
-            <a:r>
-              <a:rPr lang="en-US"/>
-              <a:t>Snippet #4</a:t>
-            </a:r>
-            <a:endParaRPr lang="en-US" dirty="0"/>
-          </a:p>
-        </p:txBody>
-      </p:sp>
-      <p:sp>
-        <p:nvSpPr>
-          <p:cNvPr id="3" name="Picture Placeholder 2">
-            <a:extLst>
-              <a:ext uri="{FF2B5EF4-FFF2-40B4-BE49-F238E27FC236}">
-                <a16:creationId xmlns:a16="http://schemas.microsoft.com/office/drawing/2014/main" id="{865CAB94-8112-ED9D-AC84-CDB3FDE411E9}"/>
-              </a:ext>
-            </a:extLst>
-          </p:cNvPr>
-          <p:cNvSpPr>
-            <a:spLocks noGrp="1"/>
-          </p:cNvSpPr>
-          <p:nvPr>
-            <p:ph type="pic" idx="1"/>
-          </p:nvPr>
-        </p:nvSpPr>
-        <p:spPr/>
-        <p:txBody>
-          <a:bodyPr/>
-          <a:lstStyle/>
-          <a:p>
-            <a:endParaRPr lang="en-US"/>
+              <a:t>Code Snippet #4</a:t>
+            </a:r>
           </a:p>
         </p:txBody>
       </p:sp>
@@ -6391,10 +7009,46 @@
           <a:bodyPr/>
           <a:lstStyle/>
           <a:p>
-            <a:endParaRPr lang="en-US"/>
-          </a:p>
-        </p:txBody>
-      </p:sp>
+            <a:endParaRPr lang="en-US" dirty="0"/>
+          </a:p>
+        </p:txBody>
+      </p:sp>
+      <p:pic>
+        <p:nvPicPr>
+          <p:cNvPr id="6" name="Picture 5">
+            <a:extLst>
+              <a:ext uri="{FF2B5EF4-FFF2-40B4-BE49-F238E27FC236}">
+                <a16:creationId xmlns:a16="http://schemas.microsoft.com/office/drawing/2014/main" id="{3A63E1E8-FA7E-55CC-AFBC-4DED95D978D2}"/>
+              </a:ext>
+            </a:extLst>
+          </p:cNvPr>
+          <p:cNvPicPr>
+            <a:picLocks noChangeAspect="1"/>
+          </p:cNvPicPr>
+          <p:nvPr/>
+        </p:nvPicPr>
+        <p:blipFill>
+          <a:blip r:embed="rId2">
+            <a:extLst>
+              <a:ext uri="{28A0092B-C50C-407E-A947-70E740481C1C}">
+                <a14:useLocalDpi xmlns:a14="http://schemas.microsoft.com/office/drawing/2010/main" val="0"/>
+              </a:ext>
+            </a:extLst>
+          </a:blip>
+          <a:stretch>
+            <a:fillRect/>
+          </a:stretch>
+        </p:blipFill>
+        <p:spPr>
+          <a:xfrm>
+            <a:off x="3978810" y="901313"/>
+            <a:ext cx="8213190" cy="1009130"/>
+          </a:xfrm>
+          <a:prstGeom prst="rect">
+            <a:avLst/>
+          </a:prstGeom>
+        </p:spPr>
+      </p:pic>
     </p:spTree>
     <p:extLst>
       <p:ext uri="{BB962C8B-B14F-4D97-AF65-F5344CB8AC3E}">

--- a/docs/CRUDBuilder_presentation.pptx
+++ b/docs/CRUDBuilder_presentation.pptx
@@ -122,7 +122,7 @@
 <file path=ppt/revisionInfo.xml><?xml version="1.0" encoding="utf-8"?>
 <p1510:revInfo xmlns:a="http://schemas.openxmlformats.org/drawingml/2006/main" xmlns:r="http://schemas.openxmlformats.org/officeDocument/2006/relationships" xmlns:p1510="http://schemas.microsoft.com/office/powerpoint/2015/10/main">
   <p1510:revLst>
-    <p1510:client id="{8059CDC7-43BD-481B-8E2C-ACB3EBAEE751}" v="1" dt="2026-05-11T16:01:08.823"/>
+    <p1510:client id="{8059CDC7-43BD-481B-8E2C-ACB3EBAEE751}" v="3" dt="2026-05-11T16:12:48.337"/>
   </p1510:revLst>
 </p1510:revInfo>
 </file>
@@ -132,7 +132,7 @@
   <pc:docChgLst>
     <pc:chgData name="Ace Cook" userId="0bf321af4922a22e" providerId="LiveId" clId="{E017BC05-3534-459D-9538-BE99AD254B3B}"/>
     <pc:docChg chg="undo custSel addSld delSld modSld">
-      <pc:chgData name="Ace Cook" userId="0bf321af4922a22e" providerId="LiveId" clId="{E017BC05-3534-459D-9538-BE99AD254B3B}" dt="2026-05-11T16:01:12.598" v="1214" actId="20577"/>
+      <pc:chgData name="Ace Cook" userId="0bf321af4922a22e" providerId="LiveId" clId="{E017BC05-3534-459D-9538-BE99AD254B3B}" dt="2026-05-11T16:13:15.818" v="1226" actId="207"/>
       <pc:docMkLst>
         <pc:docMk/>
       </pc:docMkLst>
@@ -309,11 +309,19 @@
         </pc:picChg>
       </pc:sldChg>
       <pc:sldChg chg="addSp delSp modSp mod">
-        <pc:chgData name="Ace Cook" userId="0bf321af4922a22e" providerId="LiveId" clId="{E017BC05-3534-459D-9538-BE99AD254B3B}" dt="2026-05-11T15:24:00.530" v="545" actId="1076"/>
+        <pc:chgData name="Ace Cook" userId="0bf321af4922a22e" providerId="LiveId" clId="{E017BC05-3534-459D-9538-BE99AD254B3B}" dt="2026-05-11T16:02:13.810" v="1218" actId="1076"/>
         <pc:sldMkLst>
           <pc:docMk/>
           <pc:sldMk cId="844433502" sldId="261"/>
         </pc:sldMkLst>
+        <pc:spChg chg="mod">
+          <ac:chgData name="Ace Cook" userId="0bf321af4922a22e" providerId="LiveId" clId="{E017BC05-3534-459D-9538-BE99AD254B3B}" dt="2026-05-11T16:02:06.923" v="1217" actId="1076"/>
+          <ac:spMkLst>
+            <pc:docMk/>
+            <pc:sldMk cId="844433502" sldId="261"/>
+            <ac:spMk id="2" creationId="{803B1366-3CFC-404A-F76D-05D4EDF7FAB9}"/>
+          </ac:spMkLst>
+        </pc:spChg>
         <pc:spChg chg="del">
           <ac:chgData name="Ace Cook" userId="0bf321af4922a22e" providerId="LiveId" clId="{E017BC05-3534-459D-9538-BE99AD254B3B}" dt="2026-05-11T15:20:55.564" v="462" actId="478"/>
           <ac:spMkLst>
@@ -323,7 +331,7 @@
           </ac:spMkLst>
         </pc:spChg>
         <pc:spChg chg="mod">
-          <ac:chgData name="Ace Cook" userId="0bf321af4922a22e" providerId="LiveId" clId="{E017BC05-3534-459D-9538-BE99AD254B3B}" dt="2026-05-11T15:23:31.841" v="544" actId="20577"/>
+          <ac:chgData name="Ace Cook" userId="0bf321af4922a22e" providerId="LiveId" clId="{E017BC05-3534-459D-9538-BE99AD254B3B}" dt="2026-05-11T16:02:13.810" v="1218" actId="1076"/>
           <ac:spMkLst>
             <pc:docMk/>
             <pc:sldMk cId="844433502" sldId="261"/>
@@ -331,7 +339,7 @@
           </ac:spMkLst>
         </pc:spChg>
         <pc:picChg chg="add mod">
-          <ac:chgData name="Ace Cook" userId="0bf321af4922a22e" providerId="LiveId" clId="{E017BC05-3534-459D-9538-BE99AD254B3B}" dt="2026-05-11T15:24:00.530" v="545" actId="1076"/>
+          <ac:chgData name="Ace Cook" userId="0bf321af4922a22e" providerId="LiveId" clId="{E017BC05-3534-459D-9538-BE99AD254B3B}" dt="2026-05-11T16:02:00.787" v="1216" actId="1076"/>
           <ac:picMkLst>
             <pc:docMk/>
             <pc:sldMk cId="844433502" sldId="261"/>
@@ -434,7 +442,7 @@
         </pc:cxnChg>
       </pc:sldChg>
       <pc:sldChg chg="addSp delSp modSp new mod setBg">
-        <pc:chgData name="Ace Cook" userId="0bf321af4922a22e" providerId="LiveId" clId="{E017BC05-3534-459D-9538-BE99AD254B3B}" dt="2026-05-11T15:54:28.112" v="1145" actId="26606"/>
+        <pc:chgData name="Ace Cook" userId="0bf321af4922a22e" providerId="LiveId" clId="{E017BC05-3534-459D-9538-BE99AD254B3B}" dt="2026-05-11T16:13:15.818" v="1226" actId="207"/>
         <pc:sldMkLst>
           <pc:docMk/>
           <pc:sldMk cId="324119909" sldId="263"/>
@@ -471,8 +479,8 @@
             <ac:spMk id="13" creationId="{E82ABBDC-7A44-4AE8-A04F-B5495481B9F2}"/>
           </ac:spMkLst>
         </pc:spChg>
-        <pc:graphicFrameChg chg="add">
-          <ac:chgData name="Ace Cook" userId="0bf321af4922a22e" providerId="LiveId" clId="{E017BC05-3534-459D-9538-BE99AD254B3B}" dt="2026-05-11T15:54:28.112" v="1145" actId="26606"/>
+        <pc:graphicFrameChg chg="add mod modGraphic">
+          <ac:chgData name="Ace Cook" userId="0bf321af4922a22e" providerId="LiveId" clId="{E017BC05-3534-459D-9538-BE99AD254B3B}" dt="2026-05-11T16:13:15.818" v="1226" actId="207"/>
           <ac:graphicFrameMkLst>
             <pc:docMk/>
             <pc:sldMk cId="324119909" sldId="263"/>
@@ -3252,14 +3260,18 @@
       </dgm:t>
     </dgm:pt>
     <dgm:pt modelId="{55080365-C8AF-456E-806A-284207B8D275}">
-      <dgm:prSet/>
+      <dgm:prSet custT="1"/>
       <dgm:spPr/>
       <dgm:t>
         <a:bodyPr/>
         <a:lstStyle/>
         <a:p>
           <a:r>
-            <a:rPr lang="en-US"/>
+            <a:rPr lang="en-US" sz="2000" dirty="0">
+              <a:solidFill>
+                <a:schemeClr val="bg1"/>
+              </a:solidFill>
+            </a:rPr>
             <a:t>User created object</a:t>
           </a:r>
         </a:p>
@@ -3295,7 +3307,11 @@
         <a:lstStyle/>
         <a:p>
           <a:r>
-            <a:rPr lang="en-US"/>
+            <a:rPr lang="en-US" dirty="0">
+              <a:solidFill>
+                <a:schemeClr val="bg1"/>
+              </a:solidFill>
+            </a:rPr>
             <a:t>No data is stored, until User decision</a:t>
           </a:r>
         </a:p>
@@ -3331,7 +3347,11 @@
         <a:lstStyle/>
         <a:p>
           <a:r>
-            <a:rPr lang="en-US"/>
+            <a:rPr lang="en-US" dirty="0">
+              <a:solidFill>
+                <a:schemeClr val="bg1"/>
+              </a:solidFill>
+            </a:rPr>
             <a:t>Store the user selection into a user created deck</a:t>
           </a:r>
         </a:p>
@@ -3367,7 +3387,11 @@
         <a:lstStyle/>
         <a:p>
           <a:r>
-            <a:rPr lang="en-US"/>
+            <a:rPr lang="en-US" dirty="0">
+              <a:solidFill>
+                <a:schemeClr val="bg1"/>
+              </a:solidFill>
+            </a:rPr>
             <a:t>Several decks are stored</a:t>
           </a:r>
         </a:p>
@@ -3403,7 +3427,11 @@
         <a:lstStyle/>
         <a:p>
           <a:r>
-            <a:rPr lang="en-US"/>
+            <a:rPr lang="en-US" dirty="0">
+              <a:solidFill>
+                <a:schemeClr val="bg1"/>
+              </a:solidFill>
+            </a:rPr>
             <a:t>An optional favorites object for the user</a:t>
           </a:r>
         </a:p>
@@ -4423,8 +4451,8 @@
       </dsp:nvSpPr>
       <dsp:spPr>
         <a:xfrm>
-          <a:off x="0" y="96402"/>
-          <a:ext cx="6046132" cy="834228"/>
+          <a:off x="0" y="3143"/>
+          <a:ext cx="6046132" cy="869227"/>
         </a:xfrm>
         <a:prstGeom prst="roundRect">
           <a:avLst/>
@@ -4480,12 +4508,12 @@
         </a:fontRef>
       </dsp:style>
       <dsp:txBody>
-        <a:bodyPr spcFirstLastPara="0" vert="horz" wrap="square" lIns="80010" tIns="80010" rIns="80010" bIns="80010" numCol="1" spcCol="1270" anchor="ctr" anchorCtr="0">
+        <a:bodyPr spcFirstLastPara="0" vert="horz" wrap="square" lIns="76200" tIns="76200" rIns="76200" bIns="76200" numCol="1" spcCol="1270" anchor="ctr" anchorCtr="0">
           <a:noAutofit/>
         </a:bodyPr>
         <a:lstStyle/>
         <a:p>
-          <a:pPr marL="0" lvl="0" indent="0" algn="l" defTabSz="933450">
+          <a:pPr marL="0" lvl="0" indent="0" algn="l" defTabSz="889000">
             <a:lnSpc>
               <a:spcPct val="90000"/>
             </a:lnSpc>
@@ -4498,14 +4526,18 @@
             <a:buNone/>
           </a:pPr>
           <a:r>
-            <a:rPr lang="en-US" sz="2100" kern="1200"/>
+            <a:rPr lang="en-US" sz="2000" kern="1200" dirty="0">
+              <a:solidFill>
+                <a:schemeClr val="bg1"/>
+              </a:solidFill>
+            </a:rPr>
             <a:t>User created object</a:t>
           </a:r>
         </a:p>
       </dsp:txBody>
       <dsp:txXfrm>
-        <a:off x="40724" y="137126"/>
-        <a:ext cx="5964684" cy="752780"/>
+        <a:off x="42432" y="45575"/>
+        <a:ext cx="5961268" cy="784363"/>
       </dsp:txXfrm>
     </dsp:sp>
     <dsp:sp modelId="{0A084905-2914-4C21-9B73-0C0C5EE6C3F5}">
@@ -4515,8 +4547,8 @@
       </dsp:nvSpPr>
       <dsp:spPr>
         <a:xfrm>
-          <a:off x="0" y="991110"/>
-          <a:ext cx="6046132" cy="834228"/>
+          <a:off x="0" y="935731"/>
+          <a:ext cx="6046132" cy="869227"/>
         </a:xfrm>
         <a:prstGeom prst="roundRect">
           <a:avLst/>
@@ -4572,12 +4604,12 @@
         </a:fontRef>
       </dsp:style>
       <dsp:txBody>
-        <a:bodyPr spcFirstLastPara="0" vert="horz" wrap="square" lIns="80010" tIns="80010" rIns="80010" bIns="80010" numCol="1" spcCol="1270" anchor="ctr" anchorCtr="0">
+        <a:bodyPr spcFirstLastPara="0" vert="horz" wrap="square" lIns="83820" tIns="83820" rIns="83820" bIns="83820" numCol="1" spcCol="1270" anchor="ctr" anchorCtr="0">
           <a:noAutofit/>
         </a:bodyPr>
         <a:lstStyle/>
         <a:p>
-          <a:pPr marL="0" lvl="0" indent="0" algn="l" defTabSz="933450">
+          <a:pPr marL="0" lvl="0" indent="0" algn="l" defTabSz="977900">
             <a:lnSpc>
               <a:spcPct val="90000"/>
             </a:lnSpc>
@@ -4590,14 +4622,18 @@
             <a:buNone/>
           </a:pPr>
           <a:r>
-            <a:rPr lang="en-US" sz="2100" kern="1200"/>
+            <a:rPr lang="en-US" sz="2200" kern="1200" dirty="0">
+              <a:solidFill>
+                <a:schemeClr val="bg1"/>
+              </a:solidFill>
+            </a:rPr>
             <a:t>No data is stored, until User decision</a:t>
           </a:r>
         </a:p>
       </dsp:txBody>
       <dsp:txXfrm>
-        <a:off x="40724" y="1031834"/>
-        <a:ext cx="5964684" cy="752780"/>
+        <a:off x="42432" y="978163"/>
+        <a:ext cx="5961268" cy="784363"/>
       </dsp:txXfrm>
     </dsp:sp>
     <dsp:sp modelId="{580BE62D-007E-4066-B914-3391D93E3DA7}">
@@ -4607,8 +4643,8 @@
       </dsp:nvSpPr>
       <dsp:spPr>
         <a:xfrm>
-          <a:off x="0" y="1885818"/>
-          <a:ext cx="6046132" cy="834228"/>
+          <a:off x="0" y="1868319"/>
+          <a:ext cx="6046132" cy="869227"/>
         </a:xfrm>
         <a:prstGeom prst="roundRect">
           <a:avLst/>
@@ -4664,12 +4700,12 @@
         </a:fontRef>
       </dsp:style>
       <dsp:txBody>
-        <a:bodyPr spcFirstLastPara="0" vert="horz" wrap="square" lIns="80010" tIns="80010" rIns="80010" bIns="80010" numCol="1" spcCol="1270" anchor="ctr" anchorCtr="0">
+        <a:bodyPr spcFirstLastPara="0" vert="horz" wrap="square" lIns="83820" tIns="83820" rIns="83820" bIns="83820" numCol="1" spcCol="1270" anchor="ctr" anchorCtr="0">
           <a:noAutofit/>
         </a:bodyPr>
         <a:lstStyle/>
         <a:p>
-          <a:pPr marL="0" lvl="0" indent="0" algn="l" defTabSz="933450">
+          <a:pPr marL="0" lvl="0" indent="0" algn="l" defTabSz="977900">
             <a:lnSpc>
               <a:spcPct val="90000"/>
             </a:lnSpc>
@@ -4682,14 +4718,18 @@
             <a:buNone/>
           </a:pPr>
           <a:r>
-            <a:rPr lang="en-US" sz="2100" kern="1200"/>
+            <a:rPr lang="en-US" sz="2200" kern="1200" dirty="0">
+              <a:solidFill>
+                <a:schemeClr val="bg1"/>
+              </a:solidFill>
+            </a:rPr>
             <a:t>Store the user selection into a user created deck</a:t>
           </a:r>
         </a:p>
       </dsp:txBody>
       <dsp:txXfrm>
-        <a:off x="40724" y="1926542"/>
-        <a:ext cx="5964684" cy="752780"/>
+        <a:off x="42432" y="1910751"/>
+        <a:ext cx="5961268" cy="784363"/>
       </dsp:txXfrm>
     </dsp:sp>
     <dsp:sp modelId="{4BF73A78-DBB1-42A4-B3B4-F22D1FA5D766}">
@@ -4699,8 +4739,8 @@
       </dsp:nvSpPr>
       <dsp:spPr>
         <a:xfrm>
-          <a:off x="0" y="2780527"/>
-          <a:ext cx="6046132" cy="834228"/>
+          <a:off x="0" y="2800906"/>
+          <a:ext cx="6046132" cy="869227"/>
         </a:xfrm>
         <a:prstGeom prst="roundRect">
           <a:avLst/>
@@ -4756,12 +4796,12 @@
         </a:fontRef>
       </dsp:style>
       <dsp:txBody>
-        <a:bodyPr spcFirstLastPara="0" vert="horz" wrap="square" lIns="80010" tIns="80010" rIns="80010" bIns="80010" numCol="1" spcCol="1270" anchor="ctr" anchorCtr="0">
+        <a:bodyPr spcFirstLastPara="0" vert="horz" wrap="square" lIns="83820" tIns="83820" rIns="83820" bIns="83820" numCol="1" spcCol="1270" anchor="ctr" anchorCtr="0">
           <a:noAutofit/>
         </a:bodyPr>
         <a:lstStyle/>
         <a:p>
-          <a:pPr marL="0" lvl="0" indent="0" algn="l" defTabSz="933450">
+          <a:pPr marL="0" lvl="0" indent="0" algn="l" defTabSz="977900">
             <a:lnSpc>
               <a:spcPct val="90000"/>
             </a:lnSpc>
@@ -4774,14 +4814,18 @@
             <a:buNone/>
           </a:pPr>
           <a:r>
-            <a:rPr lang="en-US" sz="2100" kern="1200"/>
+            <a:rPr lang="en-US" sz="2200" kern="1200" dirty="0">
+              <a:solidFill>
+                <a:schemeClr val="bg1"/>
+              </a:solidFill>
+            </a:rPr>
             <a:t>Several decks are stored</a:t>
           </a:r>
         </a:p>
       </dsp:txBody>
       <dsp:txXfrm>
-        <a:off x="40724" y="2821251"/>
-        <a:ext cx="5964684" cy="752780"/>
+        <a:off x="42432" y="2843338"/>
+        <a:ext cx="5961268" cy="784363"/>
       </dsp:txXfrm>
     </dsp:sp>
     <dsp:sp modelId="{CF734664-45E5-4AD8-965D-B34D4FFC495C}">
@@ -4791,8 +4835,8 @@
       </dsp:nvSpPr>
       <dsp:spPr>
         <a:xfrm>
-          <a:off x="0" y="3675235"/>
-          <a:ext cx="6046132" cy="834228"/>
+          <a:off x="0" y="3733494"/>
+          <a:ext cx="6046132" cy="869227"/>
         </a:xfrm>
         <a:prstGeom prst="roundRect">
           <a:avLst/>
@@ -4848,12 +4892,12 @@
         </a:fontRef>
       </dsp:style>
       <dsp:txBody>
-        <a:bodyPr spcFirstLastPara="0" vert="horz" wrap="square" lIns="80010" tIns="80010" rIns="80010" bIns="80010" numCol="1" spcCol="1270" anchor="ctr" anchorCtr="0">
+        <a:bodyPr spcFirstLastPara="0" vert="horz" wrap="square" lIns="83820" tIns="83820" rIns="83820" bIns="83820" numCol="1" spcCol="1270" anchor="ctr" anchorCtr="0">
           <a:noAutofit/>
         </a:bodyPr>
         <a:lstStyle/>
         <a:p>
-          <a:pPr marL="0" lvl="0" indent="0" algn="l" defTabSz="933450">
+          <a:pPr marL="0" lvl="0" indent="0" algn="l" defTabSz="977900">
             <a:lnSpc>
               <a:spcPct val="90000"/>
             </a:lnSpc>
@@ -4866,14 +4910,18 @@
             <a:buNone/>
           </a:pPr>
           <a:r>
-            <a:rPr lang="en-US" sz="2100" kern="1200"/>
+            <a:rPr lang="en-US" sz="2200" kern="1200" dirty="0">
+              <a:solidFill>
+                <a:schemeClr val="bg1"/>
+              </a:solidFill>
+            </a:rPr>
             <a:t>An optional favorites object for the user</a:t>
           </a:r>
         </a:p>
       </dsp:txBody>
       <dsp:txXfrm>
-        <a:off x="40724" y="3715959"/>
-        <a:ext cx="5964684" cy="752780"/>
+        <a:off x="42432" y="3775926"/>
+        <a:ext cx="5961268" cy="784363"/>
       </dsp:txXfrm>
     </dsp:sp>
   </dsp:spTree>
@@ -15489,12 +15537,8 @@
               <a:buChar char="•"/>
             </a:pPr>
             <a:r>
-              <a:rPr lang="en-US"/>
-              <a:t> Passes </a:t>
-            </a:r>
-            <a:r>
               <a:rPr lang="en-US" dirty="0"/>
-              <a:t>back data</a:t>
+              <a:t> Passes back data</a:t>
             </a:r>
           </a:p>
         </p:txBody>
@@ -16299,7 +16343,12 @@
             <p:ph type="title"/>
           </p:nvPr>
         </p:nvSpPr>
-        <p:spPr/>
+        <p:spPr>
+          <a:xfrm>
+            <a:off x="3428999" y="2512142"/>
+            <a:ext cx="5334001" cy="1371600"/>
+          </a:xfrm>
+        </p:spPr>
         <p:txBody>
           <a:bodyPr/>
           <a:lstStyle/>
@@ -16327,7 +16376,12 @@
             <p:ph type="body" sz="half" idx="2"/>
           </p:nvPr>
         </p:nvSpPr>
-        <p:spPr/>
+        <p:spPr>
+          <a:xfrm>
+            <a:off x="3428999" y="4387646"/>
+            <a:ext cx="5334001" cy="1828800"/>
+          </a:xfrm>
+        </p:spPr>
         <p:txBody>
           <a:bodyPr/>
           <a:lstStyle/>
@@ -16398,7 +16452,7 @@
         </p:blipFill>
         <p:spPr>
           <a:xfrm>
-            <a:off x="3607021" y="4753235"/>
+            <a:off x="1989405" y="1095635"/>
             <a:ext cx="8213190" cy="1009130"/>
           </a:xfrm>
           <a:prstGeom prst="rect">
@@ -17083,7 +17137,7 @@
             <p:ph idx="1"/>
             <p:extLst>
               <p:ext uri="{D42A27DB-BD31-4B8C-83A1-F6EECF244321}">
-                <p14:modId xmlns:p14="http://schemas.microsoft.com/office/powerpoint/2010/main" val="1775071021"/>
+                <p14:modId xmlns:p14="http://schemas.microsoft.com/office/powerpoint/2010/main" val="902426769"/>
               </p:ext>
             </p:extLst>
           </p:nvPr>

--- a/docs/CRUDBuilder_presentation.pptx
+++ b/docs/CRUDBuilder_presentation.pptx
@@ -132,7 +132,7 @@
   <pc:docChgLst>
     <pc:chgData name="Ace Cook" userId="0bf321af4922a22e" providerId="LiveId" clId="{E017BC05-3534-459D-9538-BE99AD254B3B}"/>
     <pc:docChg chg="undo custSel addSld delSld modSld">
-      <pc:chgData name="Ace Cook" userId="0bf321af4922a22e" providerId="LiveId" clId="{E017BC05-3534-459D-9538-BE99AD254B3B}" dt="2026-05-11T16:13:15.818" v="1226" actId="207"/>
+      <pc:chgData name="Ace Cook" userId="0bf321af4922a22e" providerId="LiveId" clId="{E017BC05-3534-459D-9538-BE99AD254B3B}" dt="2026-05-11T16:57:43.927" v="1255" actId="20577"/>
       <pc:docMkLst>
         <pc:docMk/>
       </pc:docMkLst>
@@ -262,7 +262,7 @@
         </pc:picChg>
       </pc:sldChg>
       <pc:sldChg chg="addSp delSp modSp mod setBg">
-        <pc:chgData name="Ace Cook" userId="0bf321af4922a22e" providerId="LiveId" clId="{E017BC05-3534-459D-9538-BE99AD254B3B}" dt="2026-05-10T16:13:20.816" v="461" actId="5793"/>
+        <pc:chgData name="Ace Cook" userId="0bf321af4922a22e" providerId="LiveId" clId="{E017BC05-3534-459D-9538-BE99AD254B3B}" dt="2026-05-11T16:57:43.927" v="1255" actId="20577"/>
         <pc:sldMkLst>
           <pc:docMk/>
           <pc:sldMk cId="804844431" sldId="260"/>
@@ -284,7 +284,7 @@
           </ac:spMkLst>
         </pc:spChg>
         <pc:spChg chg="mod ord">
-          <ac:chgData name="Ace Cook" userId="0bf321af4922a22e" providerId="LiveId" clId="{E017BC05-3534-459D-9538-BE99AD254B3B}" dt="2026-05-10T16:13:20.816" v="461" actId="5793"/>
+          <ac:chgData name="Ace Cook" userId="0bf321af4922a22e" providerId="LiveId" clId="{E017BC05-3534-459D-9538-BE99AD254B3B}" dt="2026-05-11T16:57:43.927" v="1255" actId="20577"/>
           <ac:spMkLst>
             <pc:docMk/>
             <pc:sldMk cId="804844431" sldId="260"/>
@@ -16267,6 +16267,16 @@
             </a:r>
           </a:p>
           <a:p>
+            <a:pPr lvl="1">
+              <a:buFont typeface="Arial"/>
+              <a:buChar char="•"/>
+            </a:pPr>
+            <a:r>
+              <a:rPr lang="en-US" dirty="0"/>
+              <a:t> Challenging</a:t>
+            </a:r>
+          </a:p>
+          <a:p>
             <a:pPr>
               <a:buFont typeface="Arial"/>
               <a:buChar char="•"/>
@@ -16285,6 +16295,17 @@
               <a:rPr lang="en-US" dirty="0"/>
               <a:t> Parameter Storage</a:t>
             </a:r>
+          </a:p>
+          <a:p>
+            <a:pPr>
+              <a:buFont typeface="Arial"/>
+              <a:buChar char="•"/>
+            </a:pPr>
+            <a:r>
+              <a:rPr lang="en-US"/>
+              <a:t> Filtering</a:t>
+            </a:r>
+            <a:endParaRPr lang="en-US" dirty="0"/>
           </a:p>
           <a:p>
             <a:endParaRPr lang="en-US" dirty="0"/>
